--- a/content/Lectures/Semester 1/Week 05 - Mixed Integer Programming/5 Source Files/Week 5 - Mixed Integer Programming.pptx
+++ b/content/Lectures/Semester 1/Week 05 - Mixed Integer Programming/5 Source Files/Week 5 - Mixed Integer Programming.pptx
@@ -10515,7 +10515,7 @@
             </a:pPr>
             <a:r>
               <a:rPr lang="en-GB" sz="2400" dirty="0"/>
-              <a:t>By inspection, build for city 2 and 4.</a:t>
+              <a:t>By inspection, build in cities 2 and 4.</a:t>
             </a:r>
           </a:p>
           <a:p>
@@ -28039,7 +28039,7 @@
                 </a:pPr>
                 <a:r>
                   <a:rPr lang="en-GB" sz="1600" dirty="0"/>
-                  <a:t>You can order amounts of at most 2 items</a:t>
+                  <a:t>You can order at most 2 different items</a:t>
                 </a:r>
               </a:p>
               <a:p>
@@ -29631,7 +29631,7 @@
                 </a:pPr>
                 <a:r>
                   <a:rPr lang="en-GB" sz="1600" dirty="0"/>
-                  <a:t>You can order amounts of at most 2 items</a:t>
+                  <a:t>You can order at most 2 different items</a:t>
                 </a:r>
               </a:p>
               <a:p>
